--- a/docs/presentation/20260820T011224Z-8b424c20/mac-capabilities-8b424c20.pptx
+++ b/docs/presentation/20260820T011224Z-8b424c20/mac-capabilities-8b424c20.pptx
@@ -5336,7 +5336,7 @@
                 </a:solidFill>
                 <a:latin typeface="Helvetica Neue"/>
               </a:rPr>
-              <a:t>It documents src/mac/_hermes as a vendored Hermes snapshot and a mac-hermes adapter. That directory no longer exists in the tree. Read the code, not the prose.</a:t>
+              <a:t>It documents src/mac/_hermes as a vendored Hermes snapshot, links a snapshot contract that no longer resolves, and claims coverage and lint exclusions for that path. The tree went in 3ebde2dd. The mac-hermes adapter it also names is real and unaffected.</a:t>
             </a:r>
           </a:p>
           <a:p>
